--- a/01_Портфолио_и_Проекты/проекты_базовые_GitHub/03_gazprom_agent_prototype/gazprom_executive_deck.pptx
+++ b/01_Портфолио_и_Проекты/проекты_базовые_GitHub/03_gazprom_agent_prototype/gazprom_executive_deck.pptx
@@ -3245,7 +3245,7 @@
               </a:defRPr>
             </a:pPr>
             <a:r>
-              <a:t>Сквозной выпуск: RUN_20260916_084341 [ЖИВОЙ ОНЛАЙН-ПАРСИНГ] • 2026-09-16 08:43:41</a:t>
+              <a:t>Сквозной выпуск: RUN_20260916_090615 [ЖИВОЙ ОНЛАЙН-ПАРСИНГ] • 2026-09-16 09:06:15</a:t>
             </a:r>
           </a:p>
           <a:p>

--- a/01_Портфолио_и_Проекты/проекты_базовые_GitHub/03_gazprom_agent_prototype/gazprom_executive_deck.pptx
+++ b/01_Портфолио_и_Проекты/проекты_базовые_GitHub/03_gazprom_agent_prototype/gazprom_executive_deck.pptx
@@ -3245,7 +3245,7 @@
               </a:defRPr>
             </a:pPr>
             <a:r>
-              <a:t>Сквозной выпуск: RUN_20260916_090615 [ЖИВОЙ ОНЛАЙН-ПАРСИНГ] • 2026-09-16 09:06:15</a:t>
+              <a:t>Сквозной выпуск: RUN_20260916_091000 [ЖИВОЙ ОНЛАЙН-ПАРСИНГ] • 2026-09-16 09:10:00</a:t>
             </a:r>
           </a:p>
           <a:p>

--- a/01_Портфолио_и_Проекты/проекты_базовые_GitHub/03_gazprom_agent_prototype/gazprom_executive_deck.pptx
+++ b/01_Портфолио_и_Проекты/проекты_базовые_GitHub/03_gazprom_agent_prototype/gazprom_executive_deck.pptx
@@ -3245,7 +3245,7 @@
               </a:defRPr>
             </a:pPr>
             <a:r>
-              <a:t>Сквозной выпуск: RUN_20260916_091000 [ЖИВОЙ ОНЛАЙН-ПАРСИНГ] • 2026-09-16 09:10:00</a:t>
+              <a:t>Сквозной выпуск: RUN_20260916_094756 [ЖИВОЙ ОНЛАЙН-ПАРСИНГ] • 2026-09-16 09:47:56</a:t>
             </a:r>
           </a:p>
           <a:p>

--- a/01_Портфолио_и_Проекты/проекты_базовые_GitHub/03_gazprom_agent_prototype/gazprom_executive_deck.pptx
+++ b/01_Портфолио_и_Проекты/проекты_базовые_GitHub/03_gazprom_agent_prototype/gazprom_executive_deck.pptx
@@ -3245,7 +3245,7 @@
               </a:defRPr>
             </a:pPr>
             <a:r>
-              <a:t>Сквозной выпуск: RUN_20260916_094756 [ЖИВОЙ ОНЛАЙН-ПАРСИНГ] • 2026-09-16 09:47:56</a:t>
+              <a:t>Сквозной выпуск: RUN_20260916_100436 [ЖИВОЙ ОНЛАЙН-ПАРСИНГ] • 2026-09-16 10:04:36</a:t>
             </a:r>
           </a:p>
           <a:p>
